--- a/output/wordlabs-sound-3day.pptx
+++ b/output/wordlabs-sound-3day.pptx
@@ -27501,11 +27501,11 @@
         <p:spPr>
           <a:xfrm>
             <a:off x="1874520" y="4096512"/>
-            <a:ext cx="6903720" cy="804672"/>
+            <a:ext cx="6903720" cy="658368"/>
           </a:xfrm>
           <a:prstGeom prst="rect">
             <a:avLst>
-              <a:gd name="adj" fmla="val 6818"/>
+              <a:gd name="adj" fmla="val 8333"/>
             </a:avLst>
           </a:prstGeom>
           <a:solidFill>
@@ -27527,12 +27527,12 @@
         </p:nvSpPr>
         <p:spPr>
           <a:xfrm>
-            <a:off x="2427732" y="4169664"/>
-            <a:ext cx="685800" cy="384048"/>
+            <a:off x="2254649" y="4169664"/>
+            <a:ext cx="685800" cy="475488"/>
           </a:xfrm>
           <a:prstGeom prst="rect">
             <a:avLst>
-              <a:gd name="adj" fmla="val 9524"/>
+              <a:gd name="adj" fmla="val 7692"/>
             </a:avLst>
           </a:prstGeom>
           <a:solidFill>
@@ -27554,8 +27554,8 @@
         </p:nvSpPr>
         <p:spPr>
           <a:xfrm>
-            <a:off x="2427732" y="4169664"/>
-            <a:ext cx="685800" cy="384048"/>
+            <a:off x="2254649" y="4169664"/>
+            <a:ext cx="685800" cy="475488"/>
           </a:xfrm>
           <a:prstGeom prst="rect">
             <a:avLst/>
@@ -27593,12 +27593,12 @@
         </p:nvSpPr>
         <p:spPr>
           <a:xfrm>
-            <a:off x="3639312" y="4169664"/>
-            <a:ext cx="685800" cy="384048"/>
+            <a:off x="3293146" y="4169664"/>
+            <a:ext cx="685800" cy="475488"/>
           </a:xfrm>
           <a:prstGeom prst="rect">
             <a:avLst>
-              <a:gd name="adj" fmla="val 9524"/>
+              <a:gd name="adj" fmla="val 7692"/>
             </a:avLst>
           </a:prstGeom>
           <a:solidFill>
@@ -27620,8 +27620,8 @@
         </p:nvSpPr>
         <p:spPr>
           <a:xfrm>
-            <a:off x="3639312" y="4169664"/>
-            <a:ext cx="685800" cy="384048"/>
+            <a:off x="3293146" y="4169664"/>
+            <a:ext cx="685800" cy="475488"/>
           </a:xfrm>
           <a:prstGeom prst="rect">
             <a:avLst/>
@@ -27659,12 +27659,12 @@
         </p:nvSpPr>
         <p:spPr>
           <a:xfrm>
-            <a:off x="4850892" y="4169664"/>
-            <a:ext cx="685800" cy="384048"/>
+            <a:off x="4331643" y="4169664"/>
+            <a:ext cx="685800" cy="475488"/>
           </a:xfrm>
           <a:prstGeom prst="rect">
             <a:avLst>
-              <a:gd name="adj" fmla="val 9524"/>
+              <a:gd name="adj" fmla="val 7692"/>
             </a:avLst>
           </a:prstGeom>
           <a:solidFill>
@@ -27686,8 +27686,8 @@
         </p:nvSpPr>
         <p:spPr>
           <a:xfrm>
-            <a:off x="4850892" y="4169664"/>
-            <a:ext cx="685800" cy="384048"/>
+            <a:off x="4331643" y="4169664"/>
+            <a:ext cx="685800" cy="475488"/>
           </a:xfrm>
           <a:prstGeom prst="rect">
             <a:avLst/>
@@ -27711,7 +27711,7 @@
                 <a:ea typeface="Trebuchet MS" pitchFamily="34" charset="-122"/>
                 <a:cs typeface="Trebuchet MS" pitchFamily="34" charset="-120"/>
               </a:rPr>
-              <a:t>nd</a:t>
+              <a:t>n</a:t>
             </a:r>
             <a:endParaRPr lang="en-US" sz="900" dirty="0"/>
           </a:p>
@@ -27725,12 +27725,12 @@
         </p:nvSpPr>
         <p:spPr>
           <a:xfrm>
-            <a:off x="6062472" y="4169664"/>
-            <a:ext cx="685800" cy="384048"/>
+            <a:off x="5370141" y="4169664"/>
+            <a:ext cx="685800" cy="475488"/>
           </a:xfrm>
           <a:prstGeom prst="rect">
             <a:avLst>
-              <a:gd name="adj" fmla="val 9524"/>
+              <a:gd name="adj" fmla="val 7692"/>
             </a:avLst>
           </a:prstGeom>
           <a:solidFill>
@@ -27752,8 +27752,8 @@
         </p:nvSpPr>
         <p:spPr>
           <a:xfrm>
-            <a:off x="6062472" y="4169664"/>
-            <a:ext cx="685800" cy="384048"/>
+            <a:off x="5370141" y="4169664"/>
+            <a:ext cx="685800" cy="475488"/>
           </a:xfrm>
           <a:prstGeom prst="rect">
             <a:avLst/>
@@ -27777,7 +27777,7 @@
                 <a:ea typeface="Trebuchet MS" pitchFamily="34" charset="-122"/>
                 <a:cs typeface="Trebuchet MS" pitchFamily="34" charset="-120"/>
               </a:rPr>
-              <a:t>l</a:t>
+              <a:t>d</a:t>
             </a:r>
             <a:endParaRPr lang="en-US" sz="900" dirty="0"/>
           </a:p>
@@ -27791,12 +27791,12 @@
         </p:nvSpPr>
         <p:spPr>
           <a:xfrm>
-            <a:off x="7274052" y="4169664"/>
-            <a:ext cx="685800" cy="384048"/>
+            <a:off x="6408638" y="4169664"/>
+            <a:ext cx="685800" cy="475488"/>
           </a:xfrm>
           <a:prstGeom prst="rect">
             <a:avLst>
-              <a:gd name="adj" fmla="val 9524"/>
+              <a:gd name="adj" fmla="val 7692"/>
             </a:avLst>
           </a:prstGeom>
           <a:solidFill>
@@ -27818,8 +27818,8 @@
         </p:nvSpPr>
         <p:spPr>
           <a:xfrm>
-            <a:off x="7274052" y="4169664"/>
-            <a:ext cx="685800" cy="384048"/>
+            <a:off x="6408638" y="4169664"/>
+            <a:ext cx="685800" cy="475488"/>
           </a:xfrm>
           <a:prstGeom prst="rect">
             <a:avLst/>
@@ -27843,7 +27843,7 @@
                 <a:ea typeface="Trebuchet MS" pitchFamily="34" charset="-122"/>
                 <a:cs typeface="Trebuchet MS" pitchFamily="34" charset="-120"/>
               </a:rPr>
-              <a:t>ee</a:t>
+              <a:t>l</a:t>
             </a:r>
             <a:endParaRPr lang="en-US" sz="900" dirty="0"/>
           </a:p>
@@ -27851,40 +27851,67 @@
       </p:sp>
       <p:sp>
         <p:nvSpPr>
-          <p:cNvPr id="43" name="Text 41"/>
-          <p:cNvSpPr/>
-          <p:nvPr/>
-        </p:nvSpPr>
-        <p:spPr>
-          <a:xfrm>
-            <a:off x="7274052" y="4572000"/>
-            <a:ext cx="685800" cy="219456"/>
-          </a:xfrm>
-          <a:prstGeom prst="rect">
-            <a:avLst/>
-          </a:prstGeom>
-          <a:noFill/>
-          <a:ln/>
-        </p:spPr>
-        <p:txBody>
-          <a:bodyPr wrap="square" lIns="0" tIns="0" rIns="0" bIns="0" rtlCol="0" anchor="t"/>
-          <a:lstStyle/>
-          <a:p>
-            <a:pPr algn="ctr" indent="0" marL="0">
-              <a:buNone/>
-            </a:pPr>
-            <a:r>
-              <a:rPr lang="en-US" sz="750" i="1" dirty="0">
-                <a:solidFill>
-                  <a:srgbClr val="94A3B8"/>
-                </a:solidFill>
-                <a:latin typeface="Calibri" pitchFamily="34" charset="0"/>
-                <a:ea typeface="Calibri" pitchFamily="34" charset="-122"/>
-                <a:cs typeface="Calibri" pitchFamily="34" charset="-120"/>
-              </a:rPr>
-              <a:t>/ee/</a:t>
-            </a:r>
-            <a:endParaRPr lang="en-US" sz="750" dirty="0"/>
+          <p:cNvPr id="43" name="Shape 41"/>
+          <p:cNvSpPr/>
+          <p:nvPr/>
+        </p:nvSpPr>
+        <p:spPr>
+          <a:xfrm>
+            <a:off x="7447135" y="4169664"/>
+            <a:ext cx="685800" cy="475488"/>
+          </a:xfrm>
+          <a:prstGeom prst="rect">
+            <a:avLst>
+              <a:gd name="adj" fmla="val 7692"/>
+            </a:avLst>
+          </a:prstGeom>
+          <a:solidFill>
+            <a:srgbClr val="FFFFFF"/>
+          </a:solidFill>
+          <a:ln w="12700">
+            <a:solidFill>
+              <a:srgbClr val="DB2777"/>
+            </a:solidFill>
+            <a:prstDash val="solid"/>
+          </a:ln>
+        </p:spPr>
+      </p:sp>
+      <p:sp>
+        <p:nvSpPr>
+          <p:cNvPr id="44" name="Text 42"/>
+          <p:cNvSpPr/>
+          <p:nvPr/>
+        </p:nvSpPr>
+        <p:spPr>
+          <a:xfrm>
+            <a:off x="7447135" y="4169664"/>
+            <a:ext cx="685800" cy="475488"/>
+          </a:xfrm>
+          <a:prstGeom prst="rect">
+            <a:avLst/>
+          </a:prstGeom>
+          <a:noFill/>
+          <a:ln/>
+        </p:spPr>
+        <p:txBody>
+          <a:bodyPr wrap="square" lIns="0" tIns="0" rIns="0" bIns="0" rtlCol="0" anchor="ctr"/>
+          <a:lstStyle/>
+          <a:p>
+            <a:pPr algn="ctr" indent="0" marL="0">
+              <a:buNone/>
+            </a:pPr>
+            <a:r>
+              <a:rPr lang="en-US" sz="900" b="1" dirty="0">
+                <a:solidFill>
+                  <a:srgbClr val="9D174D"/>
+                </a:solidFill>
+                <a:latin typeface="Trebuchet MS" pitchFamily="34" charset="0"/>
+                <a:ea typeface="Trebuchet MS" pitchFamily="34" charset="-122"/>
+                <a:cs typeface="Trebuchet MS" pitchFamily="34" charset="-120"/>
+              </a:rPr>
+              <a:t>y</a:t>
+            </a:r>
+            <a:endParaRPr lang="en-US" sz="900" dirty="0"/>
           </a:p>
         </p:txBody>
       </p:sp>
@@ -36476,7 +36503,7 @@
                 <a:ea typeface="Calibri" pitchFamily="34" charset="-122"/>
                 <a:cs typeface="Calibri" pitchFamily="34" charset="-120"/>
               </a:rPr>
-              <a:t>1.  The prefix 're' in 'resound' means again or back.</a:t>
+              <a:t>1.  The word 'unsound' means extremely loud and powerful.</a:t>
             </a:r>
             <a:endParaRPr lang="en-US" sz="1300" dirty="0"/>
           </a:p>
@@ -36499,11 +36526,11 @@
             </a:avLst>
           </a:prstGeom>
           <a:solidFill>
-            <a:srgbClr val="DCFCE7"/>
-          </a:solidFill>
-          <a:ln w="12700">
-            <a:solidFill>
-              <a:srgbClr val="16A34A"/>
+            <a:srgbClr val="FEE2E2"/>
+          </a:solidFill>
+          <a:ln w="12700">
+            <a:solidFill>
+              <a:srgbClr val="DC2626"/>
             </a:solidFill>
             <a:prstDash val="solid"/>
           </a:ln>
@@ -36536,13 +36563,13 @@
             <a:r>
               <a:rPr lang="en-US" sz="1100" b="1" dirty="0">
                 <a:solidFill>
-                  <a:srgbClr val="16A34A"/>
+                  <a:srgbClr val="DC2626"/>
                 </a:solidFill>
                 <a:latin typeface="Trebuchet MS" pitchFamily="34" charset="0"/>
                 <a:ea typeface="Trebuchet MS" pitchFamily="34" charset="-122"/>
                 <a:cs typeface="Trebuchet MS" pitchFamily="34" charset="-120"/>
               </a:rPr>
-              <a:t>TRUE</a:t>
+              <a:t>FALSE</a:t>
             </a:r>
             <a:endParaRPr lang="en-US" sz="1100" dirty="0"/>
           </a:p>
@@ -36615,7 +36642,7 @@
                 <a:ea typeface="Calibri" pitchFamily="34" charset="-122"/>
                 <a:cs typeface="Calibri" pitchFamily="34" charset="-120"/>
               </a:rPr>
-              <a:t>2.  The word 'soundproof' means a room that makes very loud sounds.</a:t>
+              <a:t>2.  The suffix '-ly' in 'soundly' turns the word into an adverb.</a:t>
             </a:r>
             <a:endParaRPr lang="en-US" sz="1300" dirty="0"/>
           </a:p>
@@ -36638,11 +36665,11 @@
             </a:avLst>
           </a:prstGeom>
           <a:solidFill>
-            <a:srgbClr val="FEE2E2"/>
-          </a:solidFill>
-          <a:ln w="12700">
-            <a:solidFill>
-              <a:srgbClr val="DC2626"/>
+            <a:srgbClr val="DCFCE7"/>
+          </a:solidFill>
+          <a:ln w="12700">
+            <a:solidFill>
+              <a:srgbClr val="16A34A"/>
             </a:solidFill>
             <a:prstDash val="solid"/>
           </a:ln>
@@ -36675,13 +36702,13 @@
             <a:r>
               <a:rPr lang="en-US" sz="1100" b="1" dirty="0">
                 <a:solidFill>
-                  <a:srgbClr val="DC2626"/>
+                  <a:srgbClr val="16A34A"/>
                 </a:solidFill>
                 <a:latin typeface="Trebuchet MS" pitchFamily="34" charset="0"/>
                 <a:ea typeface="Trebuchet MS" pitchFamily="34" charset="-122"/>
                 <a:cs typeface="Trebuchet MS" pitchFamily="34" charset="-120"/>
               </a:rPr>
-              <a:t>FALSE</a:t>
+              <a:t>TRUE</a:t>
             </a:r>
             <a:endParaRPr lang="en-US" sz="1100" dirty="0"/>
           </a:p>
@@ -36754,7 +36781,7 @@
                 <a:ea typeface="Calibri" pitchFamily="34" charset="-122"/>
                 <a:cs typeface="Calibri" pitchFamily="34" charset="-120"/>
               </a:rPr>
-              <a:t>3.  The root 'sound' can mean both a noise and something healthy or strong.</a:t>
+              <a:t>3.  The prefix 're' in 'resound' means again or back.</a:t>
             </a:r>
             <a:endParaRPr lang="en-US" sz="1300" dirty="0"/>
           </a:p>
@@ -36893,7 +36920,7 @@
                 <a:ea typeface="Calibri" pitchFamily="34" charset="-122"/>
                 <a:cs typeface="Calibri" pitchFamily="34" charset="-120"/>
               </a:rPr>
-              <a:t>4.  The suffix '-ly' in 'soundly' turns the word into an adverb.</a:t>
+              <a:t>4.  The root 'sound' can mean both a noise and something healthy or strong.</a:t>
             </a:r>
             <a:endParaRPr lang="en-US" sz="1300" dirty="0"/>
           </a:p>
@@ -37032,7 +37059,7 @@
                 <a:ea typeface="Calibri" pitchFamily="34" charset="-122"/>
                 <a:cs typeface="Calibri" pitchFamily="34" charset="-120"/>
               </a:rPr>
-              <a:t>5.  The word 'unsound' means extremely loud and powerful.</a:t>
+              <a:t>5.  The word 'soundproof' means a room that makes very loud sounds.</a:t>
             </a:r>
             <a:endParaRPr lang="en-US" sz="1300" dirty="0"/>
           </a:p>
